--- a/Sicurezza Parte 1, Presentazione.pptx
+++ b/Sicurezza Parte 1, Presentazione.pptx
@@ -120,39 +120,39 @@
   <p:extLst>
     <p:ext uri="{521415D9-36F7-43E2-AB2F-B90AF26B5E84}">
       <p14:sectionLst xmlns:p14="http://schemas.microsoft.com/office/powerpoint/2010/main">
-        <p14:section name="Apertura" id="{260ebeeb-3e8d-6c69-b10e-310ebe632842}">
+        <p14:section name="Apertura" id="{f9233387-50c2-eb84-e1b6-b00416f33830}">
           <p14:sldIdLst>
             <p14:sldId id="256"/>
             <p14:sldId id="257"/>
           </p14:sldIdLst>
         </p14:section>
-        <p14:section name="Perché" id="{6f22dbd6-460f-3303-5d59-85c7f5d33266}">
+        <p14:section name="Perché" id="{19e2e755-84a6-46f3-a02d-95e15d96c3e8}">
           <p14:sldIdLst>
             <p14:sldId id="258"/>
             <p14:sldId id="259"/>
             <p14:sldId id="260"/>
           </p14:sldIdLst>
         </p14:section>
-        <p14:section name="Le basi" id="{045c52ea-5098-fa79-81b7-e11f30797e67}">
+        <p14:section name="Le basi" id="{1ad97ee7-c6c8-3b7e-443e-9fd104beb076}">
           <p14:sldIdLst>
             <p14:sldId id="261"/>
             <p14:sldId id="262"/>
             <p14:sldId id="263"/>
           </p14:sldIdLst>
         </p14:section>
-        <p14:section name="Il materiale" id="{5738a986-7e3e-bcea-d49a-808ed0ac139a}">
+        <p14:section name="Il materiale" id="{f02b7a8e-178d-3066-e912-23f1a4645559}">
           <p14:sldIdLst>
             <p14:sldId id="264"/>
             <p14:sldId id="265"/>
           </p14:sldIdLst>
         </p14:section>
-        <p14:section name="Adesso" id="{ec578b4a-31c7-b994-9567-d189d2525493}">
+        <p14:section name="Adesso" id="{4cdda0e9-46ae-9dc3-d8a6-9f04b9cc0d63}">
           <p14:sldIdLst>
             <p14:sldId id="266"/>
             <p14:sldId id="267"/>
           </p14:sldIdLst>
         </p14:section>
-        <p14:section name="Chiusura" id="{3b7bf724-fef0-25dd-058b-361dea76194d}">
+        <p14:section name="Chiusura" id="{49bb7203-8187-3ed5-52c5-c549481d5266}">
           <p14:sldIdLst>
             <p14:sldId id="268"/>
             <p14:sldId id="269"/>
@@ -826,7 +826,7 @@
           <a:p>
             <a:r>
               <a:rPr lang="en-US" dirty="0"/>
-              <a:t>Il materiale è un file da aprire nel browser, funziona anche senza internet. Mostrate dal vivo dove sono l’interruttore della lingua, il menu dei capitoli e la checklist. Il programma è indicativo: decidetelo con il vostro responsabile.</a:t>
+              <a:t>Il materiale si apre da un link nel browser, anche dal telefono, e non serve nessun account. Mostrate dal vivo dove sono l’interruttore della lingua, il menu dei capitoli e la checklist. Il programma è indicativo: decidetelo con il vostro responsabile.</a:t>
             </a:r>
             <a:endParaRPr lang="en-US" dirty="0"/>
           </a:p>
@@ -1706,7 +1706,7 @@
           <a:p>
             <a:r>
               <a:rPr lang="en-US" dirty="0"/>
-              <a:t>Il materiale della Parte 1 ha tre livelli, in tre file separati. Tutti partono dal primo. Il secondo è per chi è più esposto: chi gestisce pagamenti, chi ha un ruolo dirigenziale, chi ha crypto o un profilo pubblico. Il terzo è facoltativo, per chi vuole il controllo totale della propria privacy.</a:t>
+              <a:t>Il materiale della Parte 1 è una sola pagina con tre livelli, uno per scheda. Tutti partono dal primo. Il secondo è per chi è più esposto: chi gestisce pagamenti, chi ha un ruolo dirigenziale, chi ha crypto o un profilo pubblico. Il terzo è facoltativo, per chi vuole il controllo totale della propria privacy.</a:t>
             </a:r>
             <a:endParaRPr lang="en-US" dirty="0"/>
           </a:p>
@@ -6323,7 +6323,7 @@
                 <a:ea typeface="Arial" pitchFamily="34" charset="-122"/>
                 <a:cs typeface="Arial" pitchFamily="34" charset="-120"/>
               </a:rPr>
-              <a:t>Apri il file nel browser, anche dal telefono</a:t>
+              <a:t>Apri il link nel browser, anche dal telefono</a:t>
             </a:r>
             <a:endParaRPr lang="en-US" sz="1500" dirty="0"/>
           </a:p>

--- a/Sicurezza Parte 1, Presentazione.pptx
+++ b/Sicurezza Parte 1, Presentazione.pptx
@@ -120,39 +120,39 @@
   <p:extLst>
     <p:ext uri="{521415D9-36F7-43E2-AB2F-B90AF26B5E84}">
       <p14:sectionLst xmlns:p14="http://schemas.microsoft.com/office/powerpoint/2010/main">
-        <p14:section name="Apertura" id="{f9233387-50c2-eb84-e1b6-b00416f33830}">
+        <p14:section name="Apertura" id="{2339eea9-3e73-a0c6-91b6-ed39309feb2f}">
           <p14:sldIdLst>
             <p14:sldId id="256"/>
             <p14:sldId id="257"/>
           </p14:sldIdLst>
         </p14:section>
-        <p14:section name="Perché" id="{19e2e755-84a6-46f3-a02d-95e15d96c3e8}">
+        <p14:section name="Perché" id="{8bb647d9-b8e6-a210-d7ff-4a9e3f522002}">
           <p14:sldIdLst>
             <p14:sldId id="258"/>
             <p14:sldId id="259"/>
             <p14:sldId id="260"/>
           </p14:sldIdLst>
         </p14:section>
-        <p14:section name="Le basi" id="{1ad97ee7-c6c8-3b7e-443e-9fd104beb076}">
+        <p14:section name="Le basi" id="{5b08ecdc-f588-478d-305c-e3d4e8257329}">
           <p14:sldIdLst>
             <p14:sldId id="261"/>
             <p14:sldId id="262"/>
             <p14:sldId id="263"/>
           </p14:sldIdLst>
         </p14:section>
-        <p14:section name="Il materiale" id="{f02b7a8e-178d-3066-e912-23f1a4645559}">
+        <p14:section name="Il materiale" id="{e29a6498-5d03-29b1-4f0e-044ddfcaaeb1}">
           <p14:sldIdLst>
             <p14:sldId id="264"/>
             <p14:sldId id="265"/>
           </p14:sldIdLst>
         </p14:section>
-        <p14:section name="Adesso" id="{4cdda0e9-46ae-9dc3-d8a6-9f04b9cc0d63}">
+        <p14:section name="Adesso" id="{58e98a06-98a8-28be-1437-6abc836bf788}">
           <p14:sldIdLst>
             <p14:sldId id="266"/>
             <p14:sldId id="267"/>
           </p14:sldIdLst>
         </p14:section>
-        <p14:section name="Chiusura" id="{49bb7203-8187-3ed5-52c5-c549481d5266}">
+        <p14:section name="Chiusura" id="{138e3109-f4ed-38ca-0ace-4f1f3465c57b}">
           <p14:sldIdLst>
             <p14:sldId id="268"/>
             <p14:sldId id="269"/>
@@ -562,7 +562,7 @@
           <a:p>
             <a:r>
               <a:rPr lang="en-US" dirty="0"/>
-              <a:t>Benvenuti. In 25 minuti vediamo tre cose: perché questo tema ci riguarda tutti, le basi per capire gli strumenti che usiamo ogni giorno e cosa fare subito. Il resto è nel materiale, da leggere con calma dopo l’incontro. Non serve nessuna base tecnica.</a:t>
+              <a:t>Benvenuti. In 25 minuti vediamo tre cose: perché il tema riguarda tutti, le basi degli strumenti che usiamo ogni giorno e cosa fare subito. Il resto è nel materiale, da leggere con calma dopo l’incontro. Non serve nessuna base tecnica.</a:t>
             </a:r>
             <a:endParaRPr lang="en-US" dirty="0"/>
           </a:p>
@@ -650,7 +650,7 @@
           <a:p>
             <a:r>
               <a:rPr lang="en-US" dirty="0"/>
-              <a:t>Ecco come è costruito il livello 1. La sezione A spiega i 12 rischi reali di oggi e fa provare cinque attacchi simulati, senza alcun rischio. La sezione B è il corso di informatica di base: account, email, cloud, password, verifica in due passaggi, browser, condivisione, dispositivi e backup. La sezione C chiude con gli strumenti consigliati, la checklist e il test.</a:t>
+              <a:t>Così è costruito il livello 1. La sezione A spiega i 12 rischi di oggi e fa provare cinque attacchi simulati, senza rischi. La sezione B è il corso di informatica di base: account, email, cloud, password, verifica in due passaggi, browser, condivisione, dispositivi e backup. La sezione C chiude con strumenti consigliati, checklist e test.</a:t>
             </a:r>
             <a:endParaRPr lang="en-US" dirty="0"/>
           </a:p>
@@ -738,7 +738,7 @@
           <a:p>
             <a:r>
               <a:rPr lang="en-US" dirty="0"/>
-              <a:t>Facciamolo adesso, tutti insieme, con il telefono in mano. Chi ha difficoltà alzi la mano: ci aiutiamo. Sono le tre azioni con il miglior rapporto tra tempo e protezione. Gli aggiornamenti si fanno sempre dalle impostazioni: una pagina web che vi dice di aggiornare è quasi sempre una trappola.</a:t>
+              <a:t>Facciamolo adesso, insieme, con il telefono in mano. Chi ha difficoltà alzi la mano: ci aiutiamo. Sono le tre azioni con il miglior rapporto tra tempo e protezione. Gli aggiornamenti si fanno sempre dalle impostazioni: una pagina web che vi dice di aggiornare è quasi sempre una trappola.</a:t>
             </a:r>
             <a:endParaRPr lang="en-US" dirty="0"/>
           </a:p>
@@ -914,7 +914,7 @@
           <a:p>
             <a:r>
               <a:rPr lang="en-US" dirty="0"/>
-              <a:t>Tre frasi da ricordare. E una regola: se succede qualcosa, avvisare subito è sempre la scelta giusta. Nessuno verrà rimproverato per aver segnalato un errore; i danni veri arrivano quando si aspetta.</a:t>
+              <a:t>Tre frasi da ricordare. E una regola: se succede qualcosa, avvisare subito è sempre giusto. Nessuno viene rimproverato per aver segnalato un errore; i danni veri arrivano quando si aspetta.</a:t>
             </a:r>
             <a:endParaRPr lang="en-US" dirty="0"/>
           </a:p>
@@ -1090,7 +1090,7 @@
           <a:p>
             <a:r>
               <a:rPr lang="en-US" dirty="0"/>
-              <a:t>Questa formazione parte dalle basi, come un corso di informatica: prima capiamo come funzionano le cose che usiamo ogni giorno, poi vediamo come ci attaccano, poi come proteggerci. Chi è già pratico troverà nel materiale i capitoli “Da zero” e potrà saltarli.</a:t>
+              <a:t>Partiamo dalle basi, come un corso di informatica: prima come funzionano le cose che usiamo ogni giorno, poi come ci attaccano, poi come proteggerci. Chi è già pratico può saltare i capitoli “Da zero” del materiale.</a:t>
             </a:r>
             <a:endParaRPr lang="en-US" dirty="0"/>
           </a:p>
@@ -1178,7 +1178,7 @@
           <a:p>
             <a:r>
               <a:rPr lang="en-US" dirty="0"/>
-              <a:t>Il messaggio di tutta la Parte 1. Entrare in un sistema ben protetto è difficile; convincere una persona a cliccare, a dare un codice o a fare un bonifico è molto più facile. Quasi due violazioni su tre passano da una persona. La buona notizia: si impara a riconoscerle.</a:t>
+              <a:t>Il messaggio di tutta la Parte 1. Entrare in un sistema ben protetto è difficile; convincere una persona a cliccare, dare un codice o fare un bonifico è molto più facile. Quasi due violazioni su tre passano da una persona. La buona notizia: si impara a riconoscerle.</a:t>
             </a:r>
             <a:endParaRPr lang="en-US" dirty="0"/>
           </a:p>
@@ -1354,7 +1354,7 @@
           <a:p>
             <a:r>
               <a:rPr lang="en-US" dirty="0"/>
-              <a:t>Un caso famoso ma semplice. Il cofondatore di Twitter non ha cliccato niente di strano: i criminali hanno convinto il suo operatore a trasferire il numero. Twitter stesso ha confermato che il numero era stato compromesso per una svista dell’operatore. Il punto per noi: il telefono non è solo un telefono, è la chiave di molti account.</a:t>
+              <a:t>Un caso famoso ma semplice. Dorsey non ha cliccato niente di strano: i criminali hanno convinto il suo operatore a trasferire il numero, e Twitter ha confermato la svista dell’operatore. Il punto per noi: il telefono non è solo un telefono, è la chiave di molti account.</a:t>
             </a:r>
             <a:endParaRPr lang="en-US" dirty="0"/>
           </a:p>
@@ -1442,7 +1442,7 @@
           <a:p>
             <a:r>
               <a:rPr lang="en-US" dirty="0"/>
-              <a:t>Questa è informatica di base, ed è la cosa più importante da capire. Le foto, la posta, i documenti non stanno nel telefono: stanno su un server, e telefono, computer e sito sono solo finestre. Conseguenza: perdere il telefono è un fastidio, perdere l’account è un disastro. E un file salvato solo sul computer, invece, esiste solo lì: se si rompe il computer, è perso.</a:t>
+              <a:t>Informatica di base, ed è la cosa più importante da capire. Foto, posta e documenti non stanno nel telefono: stanno su un server, e telefono, computer e sito sono solo finestre. Conseguenza: perdere il telefono è un fastidio, perdere l’account è un disastro. Un file salvato solo sul computer, invece, esiste solo lì: se il computer si rompe, è perso.</a:t>
             </a:r>
             <a:endParaRPr lang="en-US" dirty="0"/>
           </a:p>
@@ -1530,7 +1530,7 @@
           <a:p>
             <a:r>
               <a:rPr lang="en-US" dirty="0"/>
-              <a:t>Seconda base. L’indirizzo email è il tuo nome utente quasi ovunque, e soprattutto è la porta di recupero di tutti gli altri account. Se un criminale entra nella tua email, clicca “password dimenticata” su banca e social e le reimposta. Per questo la prima cosa che faremo tra poco riguarda proprio l’email.</a:t>
+              <a:t>Seconda base. L’email è il tuo nome utente quasi ovunque e, soprattutto, la porta di recupero di tutti gli altri account. Chi entra nella tua email clicca “password dimenticata” su banca e social e reimposta tutto. Per questo la prima cosa che faremo tra poco riguarda proprio l’email.</a:t>
             </a:r>
             <a:endParaRPr lang="en-US" dirty="0"/>
           </a:p>
@@ -1618,7 +1618,7 @@
           <a:p>
             <a:r>
               <a:rPr lang="en-US" dirty="0"/>
-              <a:t>Altre tre basi che evitano la maggior parte dei guai. Password diverse per ogni sito: quando un sito viene violato, i criminali provano la stessa email e password ovunque. Il dominio: è l’unica parte dell’indirizzo che non si può falsificare. E la sincronizzazione: comoda, ma copia anche gli errori e i file cifrati da un ransomware. Tutto il resto è nella sezione B del livello 1.</a:t>
+              <a:t>Tre basi che evitano la maggior parte dei guai. Password diverse per ogni sito: dopo una violazione i criminali provano la stessa email e password ovunque. Il dominio: l’unica parte dell’indirizzo che non si può falsificare. La sincronizzazione: comoda, ma copia anche gli errori e i file cifrati da un ransomware. Il resto è nella sezione B del livello 1.</a:t>
             </a:r>
             <a:endParaRPr lang="en-US" dirty="0"/>
           </a:p>
@@ -1706,7 +1706,7 @@
           <a:p>
             <a:r>
               <a:rPr lang="en-US" dirty="0"/>
-              <a:t>Il materiale della Parte 1 è una sola pagina con tre livelli, uno per scheda. Tutti partono dal primo. Il secondo è per chi è più esposto: chi gestisce pagamenti, chi ha un ruolo dirigenziale, chi ha crypto o un profilo pubblico. Il terzo è facoltativo, per chi vuole il controllo totale della propria privacy.</a:t>
+              <a:t>Il materiale della Parte 1 è una sola pagina con tre livelli, uno per scheda. Tutti partono dal primo. Il secondo è per chi è più esposto: pagamenti, ruolo dirigenziale, crypto o profilo pubblico. Il terzo è facoltativo, per chi vuole il controllo totale della propria privacy.</a:t>
             </a:r>
             <a:endParaRPr lang="en-US" dirty="0"/>
           </a:p>
@@ -8018,7 +8018,7 @@
         </p:nvSpPr>
         <p:spPr>
           <a:xfrm>
-            <a:off x="685800" y="5989320"/>
+            <a:off x="685800" y="5760720"/>
             <a:ext cx="10820095" cy="256032"/>
           </a:xfrm>
           <a:prstGeom prst="rect">
@@ -8046,6 +8046,45 @@
               <a:t>Tutte le fonti, con i link, sono anche nell’ultimo capitolo del materiale.</a:t>
             </a:r>
             <a:endParaRPr lang="en-US" sz="1100" dirty="0"/>
+          </a:p>
+        </p:txBody>
+      </p:sp>
+      <p:sp>
+        <p:nvSpPr>
+          <p:cNvPr id="10" name="Crediti"/>
+          <p:cNvSpPr txBox="1"/>
+          <p:nvPr/>
+        </p:nvSpPr>
+        <p:spPr>
+          <a:xfrm>
+            <a:off x="685800" y="6016752"/>
+            <a:ext cx="10820095" cy="329184"/>
+          </a:xfrm>
+          <a:prstGeom prst="rect">
+            <a:avLst/>
+          </a:prstGeom>
+          <a:noFill/>
+          <a:ln/>
+        </p:spPr>
+        <p:txBody>
+          <a:bodyPr wrap="square" lIns="0" tIns="0" rIns="0" bIns="0" rtlCol="0" anchor="t"/>
+          <a:lstStyle/>
+          <a:p>
+            <a:pPr indent="0" marL="0">
+              <a:buNone/>
+            </a:pPr>
+            <a:r>
+              <a:rPr lang="en-US" sz="1000" dirty="0">
+                <a:solidFill>
+                  <a:schemeClr val="accent6"/>
+                </a:solidFill>
+                <a:latin typeface="Arial" pitchFamily="34" charset="0"/>
+                <a:ea typeface="Arial" pitchFamily="34" charset="-122"/>
+                <a:cs typeface="Arial" pitchFamily="34" charset="-120"/>
+              </a:rPr>
+              <a:t>© 2026 Aron Clementi. Materiale formativo a scopo informativo: non sostituisce una consulenza legale o tecnica né le regole della tua azienda. Fonti verificate alla data indicata; strumenti e prezzi cambiano.</a:t>
+            </a:r>
+            <a:endParaRPr lang="en-US" sz="1000" dirty="0"/>
           </a:p>
         </p:txBody>
       </p:sp>
@@ -8510,7 +8549,7 @@
                 <a:ea typeface="Arial" pitchFamily="34" charset="-122"/>
                 <a:cs typeface="Arial" pitchFamily="34" charset="-120"/>
               </a:rPr>
-              <a:t>Le truffe più comuni di oggi e i segnali che le tradiscono, prima di cliccare o rispondere.</a:t>
+              <a:t>Le truffe più comuni e i segnali che le tradiscono, prima di cliccare o rispondere.</a:t>
             </a:r>
             <a:endParaRPr lang="en-US" sz="1600" dirty="0"/>
           </a:p>

--- a/Sicurezza Parte 1, Presentazione.pptx
+++ b/Sicurezza Parte 1, Presentazione.pptx
@@ -120,39 +120,39 @@
   <p:extLst>
     <p:ext uri="{521415D9-36F7-43E2-AB2F-B90AF26B5E84}">
       <p14:sectionLst xmlns:p14="http://schemas.microsoft.com/office/powerpoint/2010/main">
-        <p14:section name="Apertura" id="{2339eea9-3e73-a0c6-91b6-ed39309feb2f}">
+        <p14:section name="Apertura" id="{a1a394a5-cc4e-cded-8d7d-3b664474952d}">
           <p14:sldIdLst>
             <p14:sldId id="256"/>
             <p14:sldId id="257"/>
           </p14:sldIdLst>
         </p14:section>
-        <p14:section name="Perché" id="{8bb647d9-b8e6-a210-d7ff-4a9e3f522002}">
+        <p14:section name="Perché" id="{48bd2823-c4f0-b901-d4cc-8e8fc4d1e89f}">
           <p14:sldIdLst>
             <p14:sldId id="258"/>
             <p14:sldId id="259"/>
             <p14:sldId id="260"/>
           </p14:sldIdLst>
         </p14:section>
-        <p14:section name="Le basi" id="{5b08ecdc-f588-478d-305c-e3d4e8257329}">
+        <p14:section name="Le basi" id="{bc3ec54c-7ed1-5247-e453-a06a7a8f737f}">
           <p14:sldIdLst>
             <p14:sldId id="261"/>
             <p14:sldId id="262"/>
             <p14:sldId id="263"/>
           </p14:sldIdLst>
         </p14:section>
-        <p14:section name="Il materiale" id="{e29a6498-5d03-29b1-4f0e-044ddfcaaeb1}">
+        <p14:section name="Il materiale" id="{d83a6d79-473d-d489-21c7-ab428aac8c05}">
           <p14:sldIdLst>
             <p14:sldId id="264"/>
             <p14:sldId id="265"/>
           </p14:sldIdLst>
         </p14:section>
-        <p14:section name="Adesso" id="{58e98a06-98a8-28be-1437-6abc836bf788}">
+        <p14:section name="Adesso" id="{67820e70-dbf5-d0d2-eddf-77a187172c6d}">
           <p14:sldIdLst>
             <p14:sldId id="266"/>
             <p14:sldId id="267"/>
           </p14:sldIdLst>
         </p14:section>
-        <p14:section name="Chiusura" id="{138e3109-f4ed-38ca-0ace-4f1f3465c57b}">
+        <p14:section name="Chiusura" id="{288d2aae-7501-a9bf-baed-2a4aab22a913}">
           <p14:sldIdLst>
             <p14:sldId id="268"/>
             <p14:sldId id="269"/>

--- a/Sicurezza Parte 1, Presentazione.pptx
+++ b/Sicurezza Parte 1, Presentazione.pptx
@@ -120,39 +120,39 @@
   <p:extLst>
     <p:ext uri="{521415D9-36F7-43E2-AB2F-B90AF26B5E84}">
       <p14:sectionLst xmlns:p14="http://schemas.microsoft.com/office/powerpoint/2010/main">
-        <p14:section name="Apertura" id="{a1a394a5-cc4e-cded-8d7d-3b664474952d}">
+        <p14:section name="Apertura" id="{fe30a199-b24b-1288-58a1-95dac846b8c7}">
           <p14:sldIdLst>
             <p14:sldId id="256"/>
             <p14:sldId id="257"/>
           </p14:sldIdLst>
         </p14:section>
-        <p14:section name="Perché" id="{48bd2823-c4f0-b901-d4cc-8e8fc4d1e89f}">
+        <p14:section name="Perché" id="{27b36173-fe8e-0f3f-bc42-35c779cd77dc}">
           <p14:sldIdLst>
             <p14:sldId id="258"/>
             <p14:sldId id="259"/>
             <p14:sldId id="260"/>
           </p14:sldIdLst>
         </p14:section>
-        <p14:section name="Le basi" id="{bc3ec54c-7ed1-5247-e453-a06a7a8f737f}">
+        <p14:section name="Le basi" id="{1df956eb-6060-7de4-9f01-14e1afdcd4a4}">
           <p14:sldIdLst>
             <p14:sldId id="261"/>
             <p14:sldId id="262"/>
             <p14:sldId id="263"/>
           </p14:sldIdLst>
         </p14:section>
-        <p14:section name="Il materiale" id="{d83a6d79-473d-d489-21c7-ab428aac8c05}">
+        <p14:section name="Il materiale" id="{1e6e4ba4-c76e-3495-6364-c934dc990efd}">
           <p14:sldIdLst>
             <p14:sldId id="264"/>
             <p14:sldId id="265"/>
           </p14:sldIdLst>
         </p14:section>
-        <p14:section name="Adesso" id="{67820e70-dbf5-d0d2-eddf-77a187172c6d}">
+        <p14:section name="Adesso" id="{40aabdb6-663d-3836-6301-3b71887ada9a}">
           <p14:sldIdLst>
             <p14:sldId id="266"/>
             <p14:sldId id="267"/>
           </p14:sldIdLst>
         </p14:section>
-        <p14:section name="Chiusura" id="{288d2aae-7501-a9bf-baed-2a4aab22a913}">
+        <p14:section name="Chiusura" id="{319a503a-eaac-dad7-5982-363fa2ca20cd}">
           <p14:sldIdLst>
             <p14:sldId id="268"/>
             <p14:sldId id="269"/>

--- a/Sicurezza Parte 1, Presentazione.pptx
+++ b/Sicurezza Parte 1, Presentazione.pptx
@@ -120,39 +120,39 @@
   <p:extLst>
     <p:ext uri="{521415D9-36F7-43E2-AB2F-B90AF26B5E84}">
       <p14:sectionLst xmlns:p14="http://schemas.microsoft.com/office/powerpoint/2010/main">
-        <p14:section name="Apertura" id="{fe30a199-b24b-1288-58a1-95dac846b8c7}">
+        <p14:section name="Apertura" id="{9c9110cd-1833-69af-cf4f-a7d03176b59a}">
           <p14:sldIdLst>
             <p14:sldId id="256"/>
             <p14:sldId id="257"/>
           </p14:sldIdLst>
         </p14:section>
-        <p14:section name="Perché" id="{27b36173-fe8e-0f3f-bc42-35c779cd77dc}">
+        <p14:section name="Perché" id="{5dbec7d1-80c1-ab5e-7ba2-ffd4066f7d3a}">
           <p14:sldIdLst>
             <p14:sldId id="258"/>
             <p14:sldId id="259"/>
             <p14:sldId id="260"/>
           </p14:sldIdLst>
         </p14:section>
-        <p14:section name="Le basi" id="{1df956eb-6060-7de4-9f01-14e1afdcd4a4}">
+        <p14:section name="Le basi" id="{ceb036d1-138d-4572-5d21-3fee7f30c6bf}">
           <p14:sldIdLst>
             <p14:sldId id="261"/>
             <p14:sldId id="262"/>
             <p14:sldId id="263"/>
           </p14:sldIdLst>
         </p14:section>
-        <p14:section name="Il materiale" id="{1e6e4ba4-c76e-3495-6364-c934dc990efd}">
+        <p14:section name="Il materiale" id="{1178f9c2-07c1-0843-be44-debe44ec184c}">
           <p14:sldIdLst>
             <p14:sldId id="264"/>
             <p14:sldId id="265"/>
           </p14:sldIdLst>
         </p14:section>
-        <p14:section name="Adesso" id="{40aabdb6-663d-3836-6301-3b71887ada9a}">
+        <p14:section name="Adesso" id="{fd947f3e-1a42-3075-de88-39516fda0638}">
           <p14:sldIdLst>
             <p14:sldId id="266"/>
             <p14:sldId id="267"/>
           </p14:sldIdLst>
         </p14:section>
-        <p14:section name="Chiusura" id="{319a503a-eaac-dad7-5982-363fa2ca20cd}">
+        <p14:section name="Chiusura" id="{89c719bd-50a9-a4c8-5947-43c4830d451f}">
           <p14:sldIdLst>
             <p14:sldId id="268"/>
             <p14:sldId id="269"/>

--- a/Sicurezza Parte 1, Presentazione.pptx
+++ b/Sicurezza Parte 1, Presentazione.pptx
@@ -120,39 +120,39 @@
   <p:extLst>
     <p:ext uri="{521415D9-36F7-43E2-AB2F-B90AF26B5E84}">
       <p14:sectionLst xmlns:p14="http://schemas.microsoft.com/office/powerpoint/2010/main">
-        <p14:section name="Apertura" id="{9c9110cd-1833-69af-cf4f-a7d03176b59a}">
+        <p14:section name="Apertura" id="{ed09f2b7-abad-bfa7-be3e-b44fa05742c0}">
           <p14:sldIdLst>
             <p14:sldId id="256"/>
             <p14:sldId id="257"/>
           </p14:sldIdLst>
         </p14:section>
-        <p14:section name="Perché" id="{5dbec7d1-80c1-ab5e-7ba2-ffd4066f7d3a}">
+        <p14:section name="Perché" id="{25bd3fd8-0df8-74f0-2666-d3ec19711281}">
           <p14:sldIdLst>
             <p14:sldId id="258"/>
             <p14:sldId id="259"/>
             <p14:sldId id="260"/>
           </p14:sldIdLst>
         </p14:section>
-        <p14:section name="Le basi" id="{ceb036d1-138d-4572-5d21-3fee7f30c6bf}">
+        <p14:section name="Le basi" id="{a7e1c1b4-1301-1c66-aeb5-a34c96541ac7}">
           <p14:sldIdLst>
             <p14:sldId id="261"/>
             <p14:sldId id="262"/>
             <p14:sldId id="263"/>
           </p14:sldIdLst>
         </p14:section>
-        <p14:section name="Il materiale" id="{1178f9c2-07c1-0843-be44-debe44ec184c}">
+        <p14:section name="Il materiale" id="{db38f948-beb9-5aea-58ee-e7afa7528b55}">
           <p14:sldIdLst>
             <p14:sldId id="264"/>
             <p14:sldId id="265"/>
           </p14:sldIdLst>
         </p14:section>
-        <p14:section name="Adesso" id="{fd947f3e-1a42-3075-de88-39516fda0638}">
+        <p14:section name="Adesso" id="{1ff590cc-96b7-4f59-4363-777fc8e17451}">
           <p14:sldIdLst>
             <p14:sldId id="266"/>
             <p14:sldId id="267"/>
           </p14:sldIdLst>
         </p14:section>
-        <p14:section name="Chiusura" id="{89c719bd-50a9-a4c8-5947-43c4830d451f}">
+        <p14:section name="Chiusura" id="{eac31c15-6881-9064-c80a-10f4242f96b1}">
           <p14:sldIdLst>
             <p14:sldId id="268"/>
             <p14:sldId id="269"/>

--- a/Sicurezza Parte 1, Presentazione.pptx
+++ b/Sicurezza Parte 1, Presentazione.pptx
@@ -120,39 +120,39 @@
   <p:extLst>
     <p:ext uri="{521415D9-36F7-43E2-AB2F-B90AF26B5E84}">
       <p14:sectionLst xmlns:p14="http://schemas.microsoft.com/office/powerpoint/2010/main">
-        <p14:section name="Apertura" id="{ed09f2b7-abad-bfa7-be3e-b44fa05742c0}">
+        <p14:section name="Apertura" id="{f12504e4-d57b-e5f5-1365-cdb6ed9fb1fc}">
           <p14:sldIdLst>
             <p14:sldId id="256"/>
             <p14:sldId id="257"/>
           </p14:sldIdLst>
         </p14:section>
-        <p14:section name="Perché" id="{25bd3fd8-0df8-74f0-2666-d3ec19711281}">
+        <p14:section name="Perché" id="{69f08ec6-f183-b4ae-2f5c-0f898cbbd55f}">
           <p14:sldIdLst>
             <p14:sldId id="258"/>
             <p14:sldId id="259"/>
             <p14:sldId id="260"/>
           </p14:sldIdLst>
         </p14:section>
-        <p14:section name="Le basi" id="{a7e1c1b4-1301-1c66-aeb5-a34c96541ac7}">
+        <p14:section name="Le basi" id="{30f9c72e-3653-b79a-5df3-a1c9c7a1b27e}">
           <p14:sldIdLst>
             <p14:sldId id="261"/>
             <p14:sldId id="262"/>
             <p14:sldId id="263"/>
           </p14:sldIdLst>
         </p14:section>
-        <p14:section name="Il materiale" id="{db38f948-beb9-5aea-58ee-e7afa7528b55}">
+        <p14:section name="Il materiale" id="{cf9800df-a507-39c4-98b2-81b85e160ef3}">
           <p14:sldIdLst>
             <p14:sldId id="264"/>
             <p14:sldId id="265"/>
           </p14:sldIdLst>
         </p14:section>
-        <p14:section name="Adesso" id="{1ff590cc-96b7-4f59-4363-777fc8e17451}">
+        <p14:section name="Adesso" id="{bed46ea1-151a-f1ce-8eb2-498d1a9b1d77}">
           <p14:sldIdLst>
             <p14:sldId id="266"/>
             <p14:sldId id="267"/>
           </p14:sldIdLst>
         </p14:section>
-        <p14:section name="Chiusura" id="{eac31c15-6881-9064-c80a-10f4242f96b1}">
+        <p14:section name="Chiusura" id="{1a970801-55d8-c257-73d8-b059daf7837b}">
           <p14:sldIdLst>
             <p14:sldId id="268"/>
             <p14:sldId id="269"/>
